--- a/slides/risw-first-year-wg-sep2023.pptx
+++ b/slides/risw-first-year-wg-sep2023.pptx
@@ -3276,7 +3276,7 @@
             <a:pPr lvl="0"/>
             <a:r>
               <a:rPr/>
-              <a:t>Currently 64 members</a:t>
+              <a:t>Currently 42 members</a:t>
             </a:r>
           </a:p>
           <a:p>
@@ -3290,14 +3290,14 @@
             <a:pPr lvl="0"/>
             <a:r>
               <a:rPr/>
-              <a:t>Currently 41 organizations</a:t>
+              <a:t>Currently 36 organizations</a:t>
             </a:r>
           </a:p>
           <a:p>
             <a:pPr lvl="1"/>
             <a:r>
               <a:rPr/>
-              <a:t>Affamed, argenx, AstraZeneca, BASF, Bayer, Berry Consultants, BMS, Boehringer Ingelheim, CIMS Global, Cytel, Daiichi Sankyo, Denali, Edwards Lifesciences, Eli Lilly, EMD Serono, Erste Group, Genentech, Gilead Sciences, GSK, ICON, Independent, Johnson &amp; Johnson, Jumping Rivers, mainanalytics, MaxisIT, Merck, Merck KGaA, MSD, Novartis, Novo Nordisk, Pfizer, R&amp;G US, RCONIS, Red Door Analytics, Regeneron, Roche, RPACT, RStudio &amp; R Consortium, Sanofi, Transition Technologies Science, UCB</a:t>
+              <a:t>Alpha Stats Ltd., argenx, AstraZeneca, BASF, Bayer, Berry Consultants, BMS, Boehringer Ingelheim, CIMS Global, Daiichi Sankyo, Eli Lilly, Finc Research, Genentech, Gilead Sciences, GSK, ICON, Independent, Jumping Rivers, MaxisIT, Merck, Merck KGaA, Mirum, MSD, Novartis, Novo Nordisk, Pfizer, Priothera, RCONIS, Red Door Analytics, Regeneron, Roche, RPACT, Sanofi, Stealth Bio, The George Institute for Global Health, UCB</a:t>
             </a:r>
           </a:p>
           <a:p>

--- a/slides/risw-first-year-wg-sep2023.pptx
+++ b/slides/risw-first-year-wg-sep2023.pptx
@@ -3276,7 +3276,7 @@
             <a:pPr lvl="0"/>
             <a:r>
               <a:rPr/>
-              <a:t>Currently 42 members</a:t>
+              <a:t>Currently 43 members</a:t>
             </a:r>
           </a:p>
           <a:p>
@@ -3290,14 +3290,14 @@
             <a:pPr lvl="0"/>
             <a:r>
               <a:rPr/>
-              <a:t>Currently 36 organizations</a:t>
+              <a:t>Currently 37 organizations</a:t>
             </a:r>
           </a:p>
           <a:p>
             <a:pPr lvl="1"/>
             <a:r>
               <a:rPr/>
-              <a:t>Alpha Stats Ltd., argenx, AstraZeneca, BASF, Bayer, Berry Consultants, BMS, Boehringer Ingelheim, CIMS Global, Daiichi Sankyo, Eli Lilly, Finc Research, Genentech, Gilead Sciences, GSK, ICON, Independent, Jumping Rivers, MaxisIT, Merck, Merck KGaA, Mirum, MSD, Novartis, Novo Nordisk, Pfizer, Priothera, RCONIS, Red Door Analytics, Regeneron, Roche, RPACT, Sanofi, Stealth Bio, The George Institute for Global Health, UCB</a:t>
+              <a:t>Alpha Stats Ltd., argenx, AstraZeneca, BASF, Bayer, Berry Consultants, BMS, Boehringer Ingelheim, CIMS Global, Daiichi Sankyo, Eli Lilly, Finc Research, Genentech, Gilead Sciences, GSK, ICON, Independent, Jumping Rivers, MaxisIT, Merck, Merck KGaA, Mirum, MSD, Novartis, Novo Nordisk, Pfizer, Priothera, RCONIS, Red Door Analytics, Regeneron, Roche, RPACT, Sanofi, Stealth Bio, The George Institute for Global Health, UCB, Winicker Norimed</a:t>
             </a:r>
           </a:p>
           <a:p>

--- a/slides/risw-first-year-wg-sep2023.pptx
+++ b/slides/risw-first-year-wg-sep2023.pptx
@@ -3290,14 +3290,14 @@
             <a:pPr lvl="0"/>
             <a:r>
               <a:rPr/>
-              <a:t>Currently 37 organizations</a:t>
+              <a:t>Currently 36 organizations</a:t>
             </a:r>
           </a:p>
           <a:p>
             <a:pPr lvl="1"/>
             <a:r>
               <a:rPr/>
-              <a:t>Alpha Stats Ltd., argenx, AstraZeneca, BASF, Bayer, Berry Consultants, BMS, Boehringer Ingelheim, CIMS Global, Daiichi Sankyo, Eli Lilly, Finc Research, Genentech, Gilead Sciences, GSK, ICON, Independent, Jumping Rivers, MaxisIT, Merck, Merck KGaA, Mirum, MSD, Novartis, Novo Nordisk, Pfizer, Priothera, RCONIS, Red Door Analytics, Regeneron, Roche, RPACT, Sanofi, Stealth Bio, The George Institute for Global Health, UCB, Winicker Norimed</a:t>
+              <a:t>Alpha Stats Ltd., argenx, AstraZeneca, BASF, Bayer, Berry Consultants, BMS, Boehringer Ingelheim, CIMS Global, Daiichi Sankyo, Eli Lilly, Finc Research, Genentech, Gilead Sciences, GSK, ICON, Independent, Jumping Rivers, MaxisIT, Merck, Merck KGaA, Mirum, MSD, Novartis, Novo Nordisk, Pfizer, Priothera, RCONIS, Regeneron, Roche, RPACT, Sanofi, Stealth Bio, The George Institute for Global Health, UCB, Winicker Norimed</a:t>
             </a:r>
           </a:p>
           <a:p>
